--- a/docs/content/quarto/t_test_report.pptx
+++ b/docs/content/quarto/t_test_report.pptx
@@ -12,6 +12,7 @@
     <p:sldId id="260" r:id="rId6"/>
     <p:sldId id="261" r:id="rId7"/>
     <p:sldId id="262" r:id="rId8"/>
+    <p:sldId id="263" r:id="rId9"/>
   </p:sldIdLst>
   <p:sldSz cx="9144000" cy="5143500" type="screen16x9"/>
   <p:notesSz cx="6858000" cy="9144000"/>
@@ -3315,7 +3316,7 @@
             </a:pPr>
             <a:r>
               <a:rPr/>
-              <a:t>A reproducible write-up of the Worksheet 04 analysis</a:t>
+              <a:t>A reproducible write-up of the Worksheets 09–10 analysis</a:t>
             </a:r>
             <a:br/>
             <a:br/>
@@ -3346,7 +3347,7 @@
             </a:pPr>
             <a:r>
               <a:rPr/>
-              <a:t>2026-07-05</a:t>
+              <a:t>2026-08-27</a:t>
             </a:r>
           </a:p>
         </p:txBody>
@@ -4083,6 +4084,250 @@
           <a:chExt cx="0" cy="0"/>
         </a:xfrm>
       </p:grpSpPr>
+      <p:graphicFrame>
+        <p:nvGraphicFramePr>
+          <p:cNvPr id="6" name="Content Placeholder 5"/>
+          <p:cNvGraphicFramePr>
+            <a:graphicFrameLocks noGrp="1"/>
+          </p:cNvGraphicFramePr>
+          <p:nvPr>
+            <p:ph idx="1"/>
+          </p:nvPr>
+        </p:nvGraphicFramePr>
+        <p:xfrm>
+          <a:off x="0" y="609600"/>
+          <a:ext cx="9080500" cy="3403600"/>
+        </p:xfrm>
+        <a:graphic>
+          <a:graphicData uri="http://schemas.openxmlformats.org/drawingml/2006/table">
+            <a:tbl>
+              <a:tblPr firstRow="1" bandRow="1">
+                <a:tableStyleId>{5C22544A-7EE6-4342-B048-85BDC9FD1C3A}</a:tableStyleId>
+              </a:tblPr>
+              <a:tblGrid>
+                <a:gridCol w="1816100"/>
+                <a:gridCol w="1816100"/>
+                <a:gridCol w="1816100"/>
+                <a:gridCol w="1816100"/>
+                <a:gridCol w="1816100"/>
+              </a:tblGrid>
+              <a:tr h="0">
+                <a:tc>
+                  <a:txBody>
+                    <a:bodyPr/>
+                    <a:lstStyle/>
+                    <a:p>
+                      <a:pPr lvl="0" indent="0" marL="0" algn="r">
+                        <a:buNone/>
+                      </a:pPr>
+                      <a:r>
+                        <a:rPr/>
+                        <a:t>Mean (shady)</a:t>
+                      </a:r>
+                    </a:p>
+                  </a:txBody>
+                  <a:tcPr/>
+                </a:tc>
+                <a:tc>
+                  <a:txBody>
+                    <a:bodyPr/>
+                    <a:lstStyle/>
+                    <a:p>
+                      <a:pPr lvl="0" indent="0" marL="0" algn="r">
+                        <a:buNone/>
+                      </a:pPr>
+                      <a:r>
+                        <a:rPr/>
+                        <a:t>Mean (sunny)</a:t>
+                      </a:r>
+                    </a:p>
+                  </a:txBody>
+                  <a:tcPr/>
+                </a:tc>
+                <a:tc>
+                  <a:txBody>
+                    <a:bodyPr/>
+                    <a:lstStyle/>
+                    <a:p>
+                      <a:pPr lvl="0" indent="0" marL="0" algn="r">
+                        <a:buNone/>
+                      </a:pPr>
+                      <a:r>
+                        <a:rPr/>
+                        <a:t>t</a:t>
+                      </a:r>
+                    </a:p>
+                  </a:txBody>
+                  <a:tcPr/>
+                </a:tc>
+                <a:tc>
+                  <a:txBody>
+                    <a:bodyPr/>
+                    <a:lstStyle/>
+                    <a:p>
+                      <a:pPr lvl="0" indent="0" marL="0" algn="r">
+                        <a:buNone/>
+                      </a:pPr>
+                      <a:r>
+                        <a:rPr/>
+                        <a:t>df</a:t>
+                      </a:r>
+                    </a:p>
+                  </a:txBody>
+                  <a:tcPr/>
+                </a:tc>
+                <a:tc>
+                  <a:txBody>
+                    <a:bodyPr/>
+                    <a:lstStyle/>
+                    <a:p>
+                      <a:pPr lvl="0" indent="0" marL="0" algn="r">
+                        <a:buNone/>
+                      </a:pPr>
+                      <a:r>
+                        <a:rPr/>
+                        <a:t>p-value</a:t>
+                      </a:r>
+                    </a:p>
+                  </a:txBody>
+                  <a:tcPr/>
+                </a:tc>
+              </a:tr>
+              <a:tr h="0">
+                <a:tc>
+                  <a:txBody>
+                    <a:bodyPr/>
+                    <a:lstStyle/>
+                    <a:p>
+                      <a:pPr lvl="0" indent="0" marL="0" algn="r">
+                        <a:buNone/>
+                      </a:pPr>
+                      <a:r>
+                        <a:rPr/>
+                        <a:t>7.8</a:t>
+                      </a:r>
+                    </a:p>
+                  </a:txBody>
+                </a:tc>
+                <a:tc>
+                  <a:txBody>
+                    <a:bodyPr/>
+                    <a:lstStyle/>
+                    <a:p>
+                      <a:pPr lvl="0" indent="0" marL="0" algn="r">
+                        <a:buNone/>
+                      </a:pPr>
+                      <a:r>
+                        <a:rPr/>
+                        <a:t>3.8</a:t>
+                      </a:r>
+                    </a:p>
+                  </a:txBody>
+                </a:tc>
+                <a:tc>
+                  <a:txBody>
+                    <a:bodyPr/>
+                    <a:lstStyle/>
+                    <a:p>
+                      <a:pPr lvl="0" indent="0" marL="0" algn="r">
+                        <a:buNone/>
+                      </a:pPr>
+                      <a:r>
+                        <a:rPr/>
+                        <a:t>9.73</a:t>
+                      </a:r>
+                    </a:p>
+                  </a:txBody>
+                </a:tc>
+                <a:tc>
+                  <a:txBody>
+                    <a:bodyPr/>
+                    <a:lstStyle/>
+                    <a:p>
+                      <a:pPr lvl="0" indent="0" marL="0" algn="r">
+                        <a:buNone/>
+                      </a:pPr>
+                      <a:r>
+                        <a:rPr/>
+                        <a:t>16.8</a:t>
+                      </a:r>
+                    </a:p>
+                  </a:txBody>
+                </a:tc>
+                <a:tc>
+                  <a:txBody>
+                    <a:bodyPr/>
+                    <a:lstStyle/>
+                    <a:p>
+                      <a:pPr lvl="0" indent="0" marL="0" algn="r">
+                        <a:buNone/>
+                      </a:pPr>
+                      <a:r>
+                        <a:rPr/>
+                        <a:t>2.514428e-08</a:t>
+                      </a:r>
+                    </a:p>
+                  </a:txBody>
+                </a:tc>
+              </a:tr>
+            </a:tbl>
+          </a:graphicData>
+        </a:graphic>
+      </p:graphicFrame>
+      <p:sp>
+        <p:nvSpPr>
+          <p:cNvPr id="1" name="TextBox 3"/>
+          <p:cNvSpPr txBox="1"/>
+          <p:nvPr>
+            <p:ph idx="1"/>
+          </p:nvPr>
+        </p:nvSpPr>
+        <p:spPr>
+          <a:xfrm>
+            <a:off x="0" y="4013200"/>
+            <a:ext cx="9080500" cy="508000"/>
+          </a:xfrm>
+          <a:prstGeom prst="rect">
+            <a:avLst/>
+          </a:prstGeom>
+          <a:noFill/>
+        </p:spPr>
+        <p:txBody>
+          <a:bodyPr/>
+          <a:lstStyle/>
+          <a:p>
+            <a:pPr lvl="0" indent="0" marL="0" algn="ctr">
+              <a:buNone/>
+            </a:pPr>
+            <a:r>
+              <a:rPr/>
+              <a:t>Table 2. Welch’s two-sample t-test of leaf weight by side.</a:t>
+            </a:r>
+          </a:p>
+        </p:txBody>
+      </p:sp>
+    </p:spTree>
+  </p:cSld>
+</p:sld>
+</file>
+
+<file path=ppt/slides/slide6.xml><?xml version="1.0" encoding="utf-8"?>
+<p:sld xmlns:a="http://schemas.openxmlformats.org/drawingml/2006/main" xmlns:r="http://schemas.openxmlformats.org/officeDocument/2006/relationships" xmlns:p="http://schemas.openxmlformats.org/presentationml/2006/main">
+  <p:cSld>
+    <p:spTree>
+      <p:nvGrpSpPr>
+        <p:cNvPr id="1" name=""/>
+        <p:cNvGrpSpPr/>
+        <p:nvPr/>
+      </p:nvGrpSpPr>
+      <p:grpSpPr>
+        <a:xfrm>
+          <a:off x="0" y="0"/>
+          <a:ext cx="0" cy="0"/>
+          <a:chOff x="0" y="0"/>
+          <a:chExt cx="0" cy="0"/>
+        </a:xfrm>
+      </p:grpSpPr>
       <p:sp>
         <p:nvSpPr>
           <p:cNvPr id="4" name="Text Placeholder 3"/>
@@ -4111,7 +4356,23 @@
             </a:r>
             <a:r>
               <a:rPr/>
-              <a:t> than sunny-side leaves (Welch’s two-sample t-test: t(16.8) = 9.73, </a:t>
+              <a:t> than sunny-side leaves: the group means, SE, and </a:t>
+            </a:r>
+            <a:r>
+              <a:rPr i="1"/>
+              <a:t>n</a:t>
+            </a:r>
+            <a:r>
+              <a:rPr/>
+              <a:t> are in Table 1, and the </a:t>
+            </a:r>
+            <a:r>
+              <a:rPr i="1"/>
+              <a:t>t</a:t>
+            </a:r>
+            <a:r>
+              <a:rPr/>
+              <a:t>, df, and </a:t>
             </a:r>
             <a:r>
               <a:rPr i="1"/>
@@ -4119,7 +4380,15 @@
             </a:r>
             <a:r>
               <a:rPr/>
-              <a:t> = 2.5^{-8}). Mean ± SE weight was 7.8 ± 0.33 g for shady leaves and 3.8 ± 0.25 g for sunny leaves.</a:t>
+              <a:t>-value of the Welch’s test are in Table 2. The </a:t>
+            </a:r>
+            <a:r>
+              <a:rPr i="1"/>
+              <a:t>p</a:t>
+            </a:r>
+            <a:r>
+              <a:rPr/>
+              <a:t>-value is below the 0.05 threshold, so the difference is significant.</a:t>
             </a:r>
           </a:p>
           <a:p>
@@ -4137,25 +4406,7 @@
             </a:pPr>
             <a:r>
               <a:rPr sz="2000"/>
-              <a:t>Every statistic in that sentence — t, df, </a:t>
-            </a:r>
-            <a:r>
-              <a:rPr sz="2000" i="1"/>
-              <a:t>p</a:t>
-            </a:r>
-            <a:r>
-              <a:rPr sz="2000"/>
-              <a:t>, and both means ± SE — was inserted with inline code such as </a:t>
-            </a:r>
-            <a:r>
-              <a:rPr sz="2000">
-                <a:latin typeface="Courier"/>
-              </a:rPr>
-              <a:t>9.73</a:t>
-            </a:r>
-            <a:r>
-              <a:rPr sz="2000"/>
-              <a:t>. If a leaf measurement changed, you would fix the data file, press </a:t>
+              <a:t>Every number in Tables 1 and 2 is computed from the raw data when the document renders — nothing was typed or pasted. If a leaf measurement changed, you would fix the data file, press </a:t>
             </a:r>
             <a:r>
               <a:rPr sz="2000" b="1"/>
@@ -4163,7 +4414,7 @@
             </a:r>
             <a:r>
               <a:rPr sz="2000"/>
-              <a:t>, and the sentence would rewrite itself. In a plain script you would retype all of these by hand.</a:t>
+              <a:t>, and both tables would update themselves. In a plain script you would retype all of these by hand.</a:t>
             </a:r>
           </a:p>
         </p:txBody>
@@ -4235,7 +4486,7 @@
 </p:sld>
 </file>
 
-<file path=ppt/slides/slide6.xml><?xml version="1.0" encoding="utf-8"?>
+<file path=ppt/slides/slide7.xml><?xml version="1.0" encoding="utf-8"?>
 <p:sld xmlns:a="http://schemas.openxmlformats.org/drawingml/2006/main" xmlns:r="http://schemas.openxmlformats.org/officeDocument/2006/relationships" xmlns:p="http://schemas.openxmlformats.org/presentationml/2006/main">
   <p:cSld>
     <p:spTree>
@@ -4348,7 +4599,7 @@
 </p:sld>
 </file>
 
-<file path=ppt/slides/slide7.xml><?xml version="1.0" encoding="utf-8"?>
+<file path=ppt/slides/slide8.xml><?xml version="1.0" encoding="utf-8"?>
 <p:sld xmlns:a="http://schemas.openxmlformats.org/drawingml/2006/main" xmlns:r="http://schemas.openxmlformats.org/officeDocument/2006/relationships" xmlns:p="http://schemas.openxmlformats.org/presentationml/2006/main">
   <p:cSld>
     <p:spTree>
